--- a/examples/kickoff-de-projeto.pptx
+++ b/examples/kickoff-de-projeto.pptx
@@ -3155,8 +3155,8 @@
         </p:nvSpPr>
         <p:spPr>
           <a:xfrm>
-            <a:off x="731520" y="2194560"/>
-            <a:ext cx="10698480" cy="1463040"/>
+            <a:off x="731520" y="1920240"/>
+            <a:ext cx="10698480" cy="1737360"/>
           </a:xfrm>
           <a:prstGeom prst="rect">
             <a:avLst/>
@@ -3213,6 +3213,41 @@
                 <a:latin typeface="Calibri"/>
               </a:rPr>
               <a:t>Kickoff - 08/09/2026</a:t>
+            </a:r>
+          </a:p>
+        </p:txBody>
+      </p:sp>
+      <p:sp>
+        <p:nvSpPr>
+          <p:cNvPr id="5" name="TextBox 4"/>
+          <p:cNvSpPr txBox="1"/>
+          <p:nvPr/>
+        </p:nvSpPr>
+        <p:spPr>
+          <a:xfrm>
+            <a:off x="731520" y="5669280"/>
+            <a:ext cx="10698480" cy="457200"/>
+          </a:xfrm>
+          <a:prstGeom prst="rect">
+            <a:avLst/>
+          </a:prstGeom>
+          <a:noFill/>
+        </p:spPr>
+        <p:txBody>
+          <a:bodyPr wrap="square" anchor="t" lIns="45720" rIns="45720" tIns="27432" bIns="27432">
+            <a:spAutoFit/>
+          </a:bodyPr>
+          <a:lstStyle/>
+          <a:p>
+            <a:pPr algn="l"/>
+            <a:r>
+              <a:rPr sz="1300" b="0" i="0">
+                <a:solidFill>
+                  <a:srgbClr val="BFC9D4"/>
+                </a:solidFill>
+                <a:latin typeface="Calibri"/>
+              </a:rPr>
+              <a:t>2026-09-08</a:t>
             </a:r>
           </a:p>
         </p:txBody>
@@ -3276,8 +3311,8 @@
         </p:nvSpPr>
         <p:spPr>
           <a:xfrm>
-            <a:off x="10817352" y="6217920"/>
-            <a:ext cx="914400" cy="365760"/>
+            <a:off x="7772400" y="91440"/>
+            <a:ext cx="3959352" cy="228600"/>
           </a:xfrm>
           <a:prstGeom prst="rect">
             <a:avLst/>
@@ -3292,6 +3327,41 @@
           <a:p>
             <a:pPr algn="r"/>
             <a:r>
+              <a:rPr sz="900" b="0" i="0">
+                <a:solidFill>
+                  <a:srgbClr val="8C8C8C"/>
+                </a:solidFill>
+                <a:latin typeface="Calibri"/>
+              </a:rPr>
+              <a:t>2026-09-08</a:t>
+            </a:r>
+          </a:p>
+        </p:txBody>
+      </p:sp>
+      <p:sp>
+        <p:nvSpPr>
+          <p:cNvPr id="4" name="TextBox 3"/>
+          <p:cNvSpPr txBox="1"/>
+          <p:nvPr/>
+        </p:nvSpPr>
+        <p:spPr>
+          <a:xfrm>
+            <a:off x="10817352" y="6217920"/>
+            <a:ext cx="914400" cy="365760"/>
+          </a:xfrm>
+          <a:prstGeom prst="rect">
+            <a:avLst/>
+          </a:prstGeom>
+          <a:noFill/>
+        </p:spPr>
+        <p:txBody>
+          <a:bodyPr wrap="square" anchor="ctr" lIns="45720" rIns="45720" tIns="27432" bIns="27432">
+            <a:spAutoFit/>
+          </a:bodyPr>
+          <a:lstStyle/>
+          <a:p>
+            <a:pPr algn="r"/>
+            <a:r>
               <a:rPr sz="1000" b="0" i="0">
                 <a:solidFill>
                   <a:srgbClr val="8C8C8C"/>
@@ -3305,7 +3375,7 @@
       </p:sp>
       <p:sp>
         <p:nvSpPr>
-          <p:cNvPr id="4" name="Oval 3"/>
+          <p:cNvPr id="5" name="Oval 4"/>
           <p:cNvSpPr/>
           <p:nvPr/>
         </p:nvSpPr>
@@ -3358,7 +3428,7 @@
       </p:sp>
       <p:sp>
         <p:nvSpPr>
-          <p:cNvPr id="5" name="TextBox 4"/>
+          <p:cNvPr id="6" name="TextBox 5"/>
           <p:cNvSpPr txBox="1"/>
           <p:nvPr/>
         </p:nvSpPr>
@@ -3393,7 +3463,7 @@
       </p:sp>
       <p:sp>
         <p:nvSpPr>
-          <p:cNvPr id="6" name="Oval 5"/>
+          <p:cNvPr id="7" name="Oval 6"/>
           <p:cNvSpPr/>
           <p:nvPr/>
         </p:nvSpPr>
@@ -3446,7 +3516,7 @@
       </p:sp>
       <p:sp>
         <p:nvSpPr>
-          <p:cNvPr id="7" name="TextBox 6"/>
+          <p:cNvPr id="8" name="TextBox 7"/>
           <p:cNvSpPr txBox="1"/>
           <p:nvPr/>
         </p:nvSpPr>
@@ -3481,7 +3551,7 @@
       </p:sp>
       <p:sp>
         <p:nvSpPr>
-          <p:cNvPr id="8" name="Oval 7"/>
+          <p:cNvPr id="9" name="Oval 8"/>
           <p:cNvSpPr/>
           <p:nvPr/>
         </p:nvSpPr>
@@ -3534,7 +3604,7 @@
       </p:sp>
       <p:sp>
         <p:nvSpPr>
-          <p:cNvPr id="9" name="TextBox 8"/>
+          <p:cNvPr id="10" name="TextBox 9"/>
           <p:cNvSpPr txBox="1"/>
           <p:nvPr/>
         </p:nvSpPr>
@@ -3569,7 +3639,7 @@
       </p:sp>
       <p:sp>
         <p:nvSpPr>
-          <p:cNvPr id="10" name="Oval 9"/>
+          <p:cNvPr id="11" name="Oval 10"/>
           <p:cNvSpPr/>
           <p:nvPr/>
         </p:nvSpPr>
@@ -3622,7 +3692,7 @@
       </p:sp>
       <p:sp>
         <p:nvSpPr>
-          <p:cNvPr id="11" name="TextBox 10"/>
+          <p:cNvPr id="12" name="TextBox 11"/>
           <p:cNvSpPr txBox="1"/>
           <p:nvPr/>
         </p:nvSpPr>
@@ -3657,7 +3727,7 @@
       </p:sp>
       <p:sp>
         <p:nvSpPr>
-          <p:cNvPr id="12" name="Oval 11"/>
+          <p:cNvPr id="13" name="Oval 12"/>
           <p:cNvSpPr/>
           <p:nvPr/>
         </p:nvSpPr>
@@ -3710,7 +3780,7 @@
       </p:sp>
       <p:sp>
         <p:nvSpPr>
-          <p:cNvPr id="13" name="TextBox 12"/>
+          <p:cNvPr id="14" name="TextBox 13"/>
           <p:cNvSpPr txBox="1"/>
           <p:nvPr/>
         </p:nvSpPr>
@@ -3802,8 +3872,8 @@
         </p:nvSpPr>
         <p:spPr>
           <a:xfrm>
-            <a:off x="10817352" y="6217920"/>
-            <a:ext cx="914400" cy="365760"/>
+            <a:off x="7772400" y="91440"/>
+            <a:ext cx="3959352" cy="228600"/>
           </a:xfrm>
           <a:prstGeom prst="rect">
             <a:avLst/>
@@ -3818,6 +3888,41 @@
           <a:p>
             <a:pPr algn="r"/>
             <a:r>
+              <a:rPr sz="900" b="0" i="0">
+                <a:solidFill>
+                  <a:srgbClr val="8C8C8C"/>
+                </a:solidFill>
+                <a:latin typeface="Calibri"/>
+              </a:rPr>
+              <a:t>2026-09-08</a:t>
+            </a:r>
+          </a:p>
+        </p:txBody>
+      </p:sp>
+      <p:sp>
+        <p:nvSpPr>
+          <p:cNvPr id="4" name="TextBox 3"/>
+          <p:cNvSpPr txBox="1"/>
+          <p:nvPr/>
+        </p:nvSpPr>
+        <p:spPr>
+          <a:xfrm>
+            <a:off x="10817352" y="6217920"/>
+            <a:ext cx="914400" cy="365760"/>
+          </a:xfrm>
+          <a:prstGeom prst="rect">
+            <a:avLst/>
+          </a:prstGeom>
+          <a:noFill/>
+        </p:spPr>
+        <p:txBody>
+          <a:bodyPr wrap="square" anchor="ctr" lIns="45720" rIns="45720" tIns="27432" bIns="27432">
+            <a:spAutoFit/>
+          </a:bodyPr>
+          <a:lstStyle/>
+          <a:p>
+            <a:pPr algn="r"/>
+            <a:r>
               <a:rPr sz="1000" b="0" i="0">
                 <a:solidFill>
                   <a:srgbClr val="8C8C8C"/>
@@ -3831,7 +3936,7 @@
       </p:sp>
       <p:sp>
         <p:nvSpPr>
-          <p:cNvPr id="4" name="TextBox 3"/>
+          <p:cNvPr id="5" name="TextBox 4"/>
           <p:cNvSpPr txBox="1"/>
           <p:nvPr/>
         </p:nvSpPr>
@@ -3991,8 +4096,8 @@
         </p:nvSpPr>
         <p:spPr>
           <a:xfrm>
-            <a:off x="10817352" y="6217920"/>
-            <a:ext cx="914400" cy="365760"/>
+            <a:off x="7772400" y="91440"/>
+            <a:ext cx="3959352" cy="228600"/>
           </a:xfrm>
           <a:prstGeom prst="rect">
             <a:avLst/>
@@ -4007,13 +4112,13 @@
           <a:p>
             <a:pPr algn="r"/>
             <a:r>
-              <a:rPr sz="1000" b="0" i="0">
+              <a:rPr sz="900" b="0" i="0">
                 <a:solidFill>
                   <a:srgbClr val="8C8C8C"/>
                 </a:solidFill>
                 <a:latin typeface="Calibri"/>
               </a:rPr>
-              <a:t>4</a:t>
+              <a:t>2026-09-08</a:t>
             </a:r>
           </a:p>
         </p:txBody>
@@ -4026,8 +4131,8 @@
         </p:nvSpPr>
         <p:spPr>
           <a:xfrm>
-            <a:off x="457200" y="1463040"/>
-            <a:ext cx="5500116" cy="548640"/>
+            <a:off x="10817352" y="6217920"/>
+            <a:ext cx="914400" cy="365760"/>
           </a:xfrm>
           <a:prstGeom prst="rect">
             <a:avLst/>
@@ -4035,6 +4140,41 @@
           <a:noFill/>
         </p:spPr>
         <p:txBody>
+          <a:bodyPr wrap="square" anchor="ctr" lIns="45720" rIns="45720" tIns="27432" bIns="27432">
+            <a:spAutoFit/>
+          </a:bodyPr>
+          <a:lstStyle/>
+          <a:p>
+            <a:pPr algn="r"/>
+            <a:r>
+              <a:rPr sz="1000" b="0" i="0">
+                <a:solidFill>
+                  <a:srgbClr val="8C8C8C"/>
+                </a:solidFill>
+                <a:latin typeface="Calibri"/>
+              </a:rPr>
+              <a:t>4</a:t>
+            </a:r>
+          </a:p>
+        </p:txBody>
+      </p:sp>
+      <p:sp>
+        <p:nvSpPr>
+          <p:cNvPr id="5" name="TextBox 4"/>
+          <p:cNvSpPr txBox="1"/>
+          <p:nvPr/>
+        </p:nvSpPr>
+        <p:spPr>
+          <a:xfrm>
+            <a:off x="457200" y="1463040"/>
+            <a:ext cx="5500116" cy="548640"/>
+          </a:xfrm>
+          <a:prstGeom prst="rect">
+            <a:avLst/>
+          </a:prstGeom>
+          <a:noFill/>
+        </p:spPr>
+        <p:txBody>
           <a:bodyPr wrap="square" anchor="b" lIns="45720" rIns="45720" tIns="27432" bIns="27432">
             <a:spAutoFit/>
           </a:bodyPr>
@@ -4055,7 +4195,7 @@
       </p:sp>
       <p:sp>
         <p:nvSpPr>
-          <p:cNvPr id="5" name="Rectangle 4"/>
+          <p:cNvPr id="6" name="Rectangle 5"/>
           <p:cNvSpPr/>
           <p:nvPr/>
         </p:nvSpPr>
@@ -4099,7 +4239,7 @@
       </p:sp>
       <p:sp>
         <p:nvSpPr>
-          <p:cNvPr id="6" name="TextBox 5"/>
+          <p:cNvPr id="7" name="TextBox 6"/>
           <p:cNvSpPr txBox="1"/>
           <p:nvPr/>
         </p:nvSpPr>
@@ -4182,7 +4322,7 @@
       </p:sp>
       <p:sp>
         <p:nvSpPr>
-          <p:cNvPr id="7" name="TextBox 6"/>
+          <p:cNvPr id="8" name="TextBox 7"/>
           <p:cNvSpPr txBox="1"/>
           <p:nvPr/>
         </p:nvSpPr>
@@ -4217,7 +4357,7 @@
       </p:sp>
       <p:sp>
         <p:nvSpPr>
-          <p:cNvPr id="8" name="Rectangle 7"/>
+          <p:cNvPr id="9" name="Rectangle 8"/>
           <p:cNvSpPr/>
           <p:nvPr/>
         </p:nvSpPr>
@@ -4261,7 +4401,7 @@
       </p:sp>
       <p:sp>
         <p:nvSpPr>
-          <p:cNvPr id="9" name="TextBox 8"/>
+          <p:cNvPr id="10" name="TextBox 9"/>
           <p:cNvSpPr txBox="1"/>
           <p:nvPr/>
         </p:nvSpPr>
@@ -4401,8 +4541,8 @@
         </p:nvSpPr>
         <p:spPr>
           <a:xfrm>
-            <a:off x="10817352" y="6217920"/>
-            <a:ext cx="914400" cy="365760"/>
+            <a:off x="7772400" y="91440"/>
+            <a:ext cx="3959352" cy="228600"/>
           </a:xfrm>
           <a:prstGeom prst="rect">
             <a:avLst/>
@@ -4417,6 +4557,41 @@
           <a:p>
             <a:pPr algn="r"/>
             <a:r>
+              <a:rPr sz="900" b="0" i="0">
+                <a:solidFill>
+                  <a:srgbClr val="8C8C8C"/>
+                </a:solidFill>
+                <a:latin typeface="Calibri"/>
+              </a:rPr>
+              <a:t>2026-09-08</a:t>
+            </a:r>
+          </a:p>
+        </p:txBody>
+      </p:sp>
+      <p:sp>
+        <p:nvSpPr>
+          <p:cNvPr id="4" name="TextBox 3"/>
+          <p:cNvSpPr txBox="1"/>
+          <p:nvPr/>
+        </p:nvSpPr>
+        <p:spPr>
+          <a:xfrm>
+            <a:off x="10817352" y="6217920"/>
+            <a:ext cx="914400" cy="365760"/>
+          </a:xfrm>
+          <a:prstGeom prst="rect">
+            <a:avLst/>
+          </a:prstGeom>
+          <a:noFill/>
+        </p:spPr>
+        <p:txBody>
+          <a:bodyPr wrap="square" anchor="ctr" lIns="45720" rIns="45720" tIns="27432" bIns="27432">
+            <a:spAutoFit/>
+          </a:bodyPr>
+          <a:lstStyle/>
+          <a:p>
+            <a:pPr algn="r"/>
+            <a:r>
               <a:rPr sz="1000" b="0" i="0">
                 <a:solidFill>
                   <a:srgbClr val="8C8C8C"/>
@@ -4430,7 +4605,7 @@
       </p:sp>
       <p:sp>
         <p:nvSpPr>
-          <p:cNvPr id="4" name="Rectangle 3"/>
+          <p:cNvPr id="5" name="Rectangle 4"/>
           <p:cNvSpPr/>
           <p:nvPr/>
         </p:nvSpPr>
@@ -4474,7 +4649,7 @@
       </p:sp>
       <p:sp>
         <p:nvSpPr>
-          <p:cNvPr id="5" name="Oval 4"/>
+          <p:cNvPr id="6" name="Oval 5"/>
           <p:cNvSpPr/>
           <p:nvPr/>
         </p:nvSpPr>
@@ -4520,7 +4695,7 @@
       </p:sp>
       <p:sp>
         <p:nvSpPr>
-          <p:cNvPr id="6" name="TextBox 5"/>
+          <p:cNvPr id="7" name="TextBox 6"/>
           <p:cNvSpPr txBox="1"/>
           <p:nvPr/>
         </p:nvSpPr>
@@ -4555,7 +4730,7 @@
       </p:sp>
       <p:sp>
         <p:nvSpPr>
-          <p:cNvPr id="7" name="TextBox 6"/>
+          <p:cNvPr id="8" name="TextBox 7"/>
           <p:cNvSpPr txBox="1"/>
           <p:nvPr/>
         </p:nvSpPr>
@@ -4590,7 +4765,7 @@
       </p:sp>
       <p:sp>
         <p:nvSpPr>
-          <p:cNvPr id="8" name="Oval 7"/>
+          <p:cNvPr id="9" name="Oval 8"/>
           <p:cNvSpPr/>
           <p:nvPr/>
         </p:nvSpPr>
@@ -4636,7 +4811,7 @@
       </p:sp>
       <p:sp>
         <p:nvSpPr>
-          <p:cNvPr id="9" name="TextBox 8"/>
+          <p:cNvPr id="10" name="TextBox 9"/>
           <p:cNvSpPr txBox="1"/>
           <p:nvPr/>
         </p:nvSpPr>
@@ -4671,7 +4846,7 @@
       </p:sp>
       <p:sp>
         <p:nvSpPr>
-          <p:cNvPr id="10" name="TextBox 9"/>
+          <p:cNvPr id="11" name="TextBox 10"/>
           <p:cNvSpPr txBox="1"/>
           <p:nvPr/>
         </p:nvSpPr>
@@ -4706,7 +4881,7 @@
       </p:sp>
       <p:sp>
         <p:nvSpPr>
-          <p:cNvPr id="11" name="Oval 10"/>
+          <p:cNvPr id="12" name="Oval 11"/>
           <p:cNvSpPr/>
           <p:nvPr/>
         </p:nvSpPr>
@@ -4752,7 +4927,7 @@
       </p:sp>
       <p:sp>
         <p:nvSpPr>
-          <p:cNvPr id="12" name="TextBox 11"/>
+          <p:cNvPr id="13" name="TextBox 12"/>
           <p:cNvSpPr txBox="1"/>
           <p:nvPr/>
         </p:nvSpPr>
@@ -4787,7 +4962,7 @@
       </p:sp>
       <p:sp>
         <p:nvSpPr>
-          <p:cNvPr id="13" name="TextBox 12"/>
+          <p:cNvPr id="14" name="TextBox 13"/>
           <p:cNvSpPr txBox="1"/>
           <p:nvPr/>
         </p:nvSpPr>
@@ -4822,7 +4997,7 @@
       </p:sp>
       <p:sp>
         <p:nvSpPr>
-          <p:cNvPr id="14" name="Oval 13"/>
+          <p:cNvPr id="15" name="Oval 14"/>
           <p:cNvSpPr/>
           <p:nvPr/>
         </p:nvSpPr>
@@ -4868,7 +5043,7 @@
       </p:sp>
       <p:sp>
         <p:nvSpPr>
-          <p:cNvPr id="15" name="TextBox 14"/>
+          <p:cNvPr id="16" name="TextBox 15"/>
           <p:cNvSpPr txBox="1"/>
           <p:nvPr/>
         </p:nvSpPr>
@@ -4903,7 +5078,7 @@
       </p:sp>
       <p:sp>
         <p:nvSpPr>
-          <p:cNvPr id="16" name="TextBox 15"/>
+          <p:cNvPr id="17" name="TextBox 16"/>
           <p:cNvSpPr txBox="1"/>
           <p:nvPr/>
         </p:nvSpPr>
@@ -4938,7 +5113,7 @@
       </p:sp>
       <p:sp>
         <p:nvSpPr>
-          <p:cNvPr id="17" name="Oval 16"/>
+          <p:cNvPr id="18" name="Oval 17"/>
           <p:cNvSpPr/>
           <p:nvPr/>
         </p:nvSpPr>
@@ -4982,7 +5157,7 @@
       </p:sp>
       <p:sp>
         <p:nvSpPr>
-          <p:cNvPr id="18" name="TextBox 17"/>
+          <p:cNvPr id="19" name="TextBox 18"/>
           <p:cNvSpPr txBox="1"/>
           <p:nvPr/>
         </p:nvSpPr>
@@ -5074,8 +5249,8 @@
         </p:nvSpPr>
         <p:spPr>
           <a:xfrm>
-            <a:off x="10817352" y="6217920"/>
-            <a:ext cx="914400" cy="365760"/>
+            <a:off x="7772400" y="91440"/>
+            <a:ext cx="3959352" cy="228600"/>
           </a:xfrm>
           <a:prstGeom prst="rect">
             <a:avLst/>
@@ -5090,6 +5265,41 @@
           <a:p>
             <a:pPr algn="r"/>
             <a:r>
+              <a:rPr sz="900" b="0" i="0">
+                <a:solidFill>
+                  <a:srgbClr val="8C8C8C"/>
+                </a:solidFill>
+                <a:latin typeface="Calibri"/>
+              </a:rPr>
+              <a:t>2026-09-08</a:t>
+            </a:r>
+          </a:p>
+        </p:txBody>
+      </p:sp>
+      <p:sp>
+        <p:nvSpPr>
+          <p:cNvPr id="4" name="TextBox 3"/>
+          <p:cNvSpPr txBox="1"/>
+          <p:nvPr/>
+        </p:nvSpPr>
+        <p:spPr>
+          <a:xfrm>
+            <a:off x="10817352" y="6217920"/>
+            <a:ext cx="914400" cy="365760"/>
+          </a:xfrm>
+          <a:prstGeom prst="rect">
+            <a:avLst/>
+          </a:prstGeom>
+          <a:noFill/>
+        </p:spPr>
+        <p:txBody>
+          <a:bodyPr wrap="square" anchor="ctr" lIns="45720" rIns="45720" tIns="27432" bIns="27432">
+            <a:spAutoFit/>
+          </a:bodyPr>
+          <a:lstStyle/>
+          <a:p>
+            <a:pPr algn="r"/>
+            <a:r>
               <a:rPr sz="1000" b="0" i="0">
                 <a:solidFill>
                   <a:srgbClr val="8C8C8C"/>
@@ -5103,7 +5313,7 @@
       </p:sp>
       <p:graphicFrame>
         <p:nvGraphicFramePr>
-          <p:cNvPr id="4" name="Table 3"/>
+          <p:cNvPr id="5" name="Table 4"/>
           <p:cNvGraphicFramePr>
             <a:graphicFrameLocks noGrp="1"/>
           </p:cNvGraphicFramePr>
@@ -5542,8 +5752,8 @@
         </p:nvSpPr>
         <p:spPr>
           <a:xfrm>
-            <a:off x="10817352" y="6217920"/>
-            <a:ext cx="914400" cy="365760"/>
+            <a:off x="7772400" y="91440"/>
+            <a:ext cx="3959352" cy="228600"/>
           </a:xfrm>
           <a:prstGeom prst="rect">
             <a:avLst/>
@@ -5558,6 +5768,41 @@
           <a:p>
             <a:pPr algn="r"/>
             <a:r>
+              <a:rPr sz="900" b="0" i="0">
+                <a:solidFill>
+                  <a:srgbClr val="8C8C8C"/>
+                </a:solidFill>
+                <a:latin typeface="Calibri"/>
+              </a:rPr>
+              <a:t>2026-09-08</a:t>
+            </a:r>
+          </a:p>
+        </p:txBody>
+      </p:sp>
+      <p:sp>
+        <p:nvSpPr>
+          <p:cNvPr id="4" name="TextBox 3"/>
+          <p:cNvSpPr txBox="1"/>
+          <p:nvPr/>
+        </p:nvSpPr>
+        <p:spPr>
+          <a:xfrm>
+            <a:off x="10817352" y="6217920"/>
+            <a:ext cx="914400" cy="365760"/>
+          </a:xfrm>
+          <a:prstGeom prst="rect">
+            <a:avLst/>
+          </a:prstGeom>
+          <a:noFill/>
+        </p:spPr>
+        <p:txBody>
+          <a:bodyPr wrap="square" anchor="ctr" lIns="45720" rIns="45720" tIns="27432" bIns="27432">
+            <a:spAutoFit/>
+          </a:bodyPr>
+          <a:lstStyle/>
+          <a:p>
+            <a:pPr algn="r"/>
+            <a:r>
               <a:rPr sz="1000" b="0" i="0">
                 <a:solidFill>
                   <a:srgbClr val="8C8C8C"/>
@@ -5571,7 +5816,7 @@
       </p:sp>
       <p:graphicFrame>
         <p:nvGraphicFramePr>
-          <p:cNvPr id="4" name="Table 3"/>
+          <p:cNvPr id="5" name="Table 4"/>
           <p:cNvGraphicFramePr>
             <a:graphicFrameLocks noGrp="1"/>
           </p:cNvGraphicFramePr>
